--- a/m1/diapositivos/sessao-08-m1-f15.pptx
+++ b/m1/diapositivos/sessao-08-m1-f15.pptx
@@ -1884,7 +1884,279 @@
                 <a:ea typeface="Georgia" pitchFamily="34" charset="-122"/>
                 <a:cs typeface="Georgia" pitchFamily="34" charset="-120"/>
               </a:rPr>
-              <a:t>Duas orações estão coordenadas quando se ligam sem que nenhuma seja parte da outra. Na subordinação, pelo contrário, uma oração ocupa um lugar dentro da outra: é sujeito, complemento, ou acompanha um nome. O que liga duas coordenadas é uma conjunção coordenativa (ou só uma vírgula). Há também advérbios e locuções de ligação — porém, contudo, todavia, por isso — que exprimem os mesmos valores sem serem conjunções.</a:t>
+              <a:t>Duas orações estão </a:t>
+            </a:r>
+            <a:pPr indent="0" marL="0">
+              <a:lnSpc>
+                <a:spcPct val="120000"/>
+              </a:lnSpc>
+              <a:buNone/>
+            </a:pPr>
+            <a:r>
+              <a:rPr lang="en-US" sz="2300" b="1" dirty="0">
+                <a:solidFill>
+                  <a:srgbClr val="F2F0EA"/>
+                </a:solidFill>
+                <a:latin typeface="Georgia" pitchFamily="34" charset="0"/>
+                <a:ea typeface="Georgia" pitchFamily="34" charset="-122"/>
+                <a:cs typeface="Georgia" pitchFamily="34" charset="-120"/>
+              </a:rPr>
+              <a:t>coordenadas</a:t>
+            </a:r>
+            <a:pPr indent="0" marL="0">
+              <a:lnSpc>
+                <a:spcPct val="120000"/>
+              </a:lnSpc>
+              <a:buNone/>
+            </a:pPr>
+            <a:r>
+              <a:rPr lang="en-US" sz="2300" dirty="0">
+                <a:solidFill>
+                  <a:srgbClr val="F2F0EA"/>
+                </a:solidFill>
+                <a:latin typeface="Georgia" pitchFamily="34" charset="0"/>
+                <a:ea typeface="Georgia" pitchFamily="34" charset="-122"/>
+                <a:cs typeface="Georgia" pitchFamily="34" charset="-120"/>
+              </a:rPr>
+              <a:t> quando se ligam </a:t>
+            </a:r>
+            <a:pPr indent="0" marL="0">
+              <a:lnSpc>
+                <a:spcPct val="120000"/>
+              </a:lnSpc>
+              <a:buNone/>
+            </a:pPr>
+            <a:r>
+              <a:rPr lang="en-US" sz="2300" b="1" dirty="0">
+                <a:solidFill>
+                  <a:srgbClr val="F2F0EA"/>
+                </a:solidFill>
+                <a:latin typeface="Georgia" pitchFamily="34" charset="0"/>
+                <a:ea typeface="Georgia" pitchFamily="34" charset="-122"/>
+                <a:cs typeface="Georgia" pitchFamily="34" charset="-120"/>
+              </a:rPr>
+              <a:t>sem que nenhuma seja parte da outra</a:t>
+            </a:r>
+            <a:pPr indent="0" marL="0">
+              <a:lnSpc>
+                <a:spcPct val="120000"/>
+              </a:lnSpc>
+              <a:buNone/>
+            </a:pPr>
+            <a:r>
+              <a:rPr lang="en-US" sz="2300" dirty="0">
+                <a:solidFill>
+                  <a:srgbClr val="F2F0EA"/>
+                </a:solidFill>
+                <a:latin typeface="Georgia" pitchFamily="34" charset="0"/>
+                <a:ea typeface="Georgia" pitchFamily="34" charset="-122"/>
+                <a:cs typeface="Georgia" pitchFamily="34" charset="-120"/>
+              </a:rPr>
+              <a:t>. Na subordinação, pelo contrário, uma oração ocupa um lugar dentro da outra: é sujeito, complemento, ou acompanha um nome. O que liga duas coordenadas é uma </a:t>
+            </a:r>
+            <a:pPr indent="0" marL="0">
+              <a:lnSpc>
+                <a:spcPct val="120000"/>
+              </a:lnSpc>
+              <a:buNone/>
+            </a:pPr>
+            <a:r>
+              <a:rPr lang="en-US" sz="2300" b="1" dirty="0">
+                <a:solidFill>
+                  <a:srgbClr val="F2F0EA"/>
+                </a:solidFill>
+                <a:latin typeface="Georgia" pitchFamily="34" charset="0"/>
+                <a:ea typeface="Georgia" pitchFamily="34" charset="-122"/>
+                <a:cs typeface="Georgia" pitchFamily="34" charset="-120"/>
+              </a:rPr>
+              <a:t>conjunção coordenativa</a:t>
+            </a:r>
+            <a:pPr indent="0" marL="0">
+              <a:lnSpc>
+                <a:spcPct val="120000"/>
+              </a:lnSpc>
+              <a:buNone/>
+            </a:pPr>
+            <a:r>
+              <a:rPr lang="en-US" sz="2300" dirty="0">
+                <a:solidFill>
+                  <a:srgbClr val="F2F0EA"/>
+                </a:solidFill>
+                <a:latin typeface="Georgia" pitchFamily="34" charset="0"/>
+                <a:ea typeface="Georgia" pitchFamily="34" charset="-122"/>
+                <a:cs typeface="Georgia" pitchFamily="34" charset="-120"/>
+              </a:rPr>
+              <a:t> (ou só uma vírgula). Há também </a:t>
+            </a:r>
+            <a:pPr indent="0" marL="0">
+              <a:lnSpc>
+                <a:spcPct val="120000"/>
+              </a:lnSpc>
+              <a:buNone/>
+            </a:pPr>
+            <a:r>
+              <a:rPr lang="en-US" sz="2300" b="1" dirty="0">
+                <a:solidFill>
+                  <a:srgbClr val="F2F0EA"/>
+                </a:solidFill>
+                <a:latin typeface="Georgia" pitchFamily="34" charset="0"/>
+                <a:ea typeface="Georgia" pitchFamily="34" charset="-122"/>
+                <a:cs typeface="Georgia" pitchFamily="34" charset="-120"/>
+              </a:rPr>
+              <a:t>advérbios e locuções de ligação</a:t>
+            </a:r>
+            <a:pPr indent="0" marL="0">
+              <a:lnSpc>
+                <a:spcPct val="120000"/>
+              </a:lnSpc>
+              <a:buNone/>
+            </a:pPr>
+            <a:r>
+              <a:rPr lang="en-US" sz="2300" dirty="0">
+                <a:solidFill>
+                  <a:srgbClr val="F2F0EA"/>
+                </a:solidFill>
+                <a:latin typeface="Georgia" pitchFamily="34" charset="0"/>
+                <a:ea typeface="Georgia" pitchFamily="34" charset="-122"/>
+                <a:cs typeface="Georgia" pitchFamily="34" charset="-120"/>
+              </a:rPr>
+              <a:t> — </a:t>
+            </a:r>
+            <a:pPr indent="0" marL="0">
+              <a:lnSpc>
+                <a:spcPct val="120000"/>
+              </a:lnSpc>
+              <a:buNone/>
+            </a:pPr>
+            <a:r>
+              <a:rPr lang="en-US" sz="2300" i="1" dirty="0">
+                <a:solidFill>
+                  <a:srgbClr val="F2F0EA"/>
+                </a:solidFill>
+                <a:latin typeface="Georgia" pitchFamily="34" charset="0"/>
+                <a:ea typeface="Georgia" pitchFamily="34" charset="-122"/>
+                <a:cs typeface="Georgia" pitchFamily="34" charset="-120"/>
+              </a:rPr>
+              <a:t>porém</a:t>
+            </a:r>
+            <a:pPr indent="0" marL="0">
+              <a:lnSpc>
+                <a:spcPct val="120000"/>
+              </a:lnSpc>
+              <a:buNone/>
+            </a:pPr>
+            <a:r>
+              <a:rPr lang="en-US" sz="2300" dirty="0">
+                <a:solidFill>
+                  <a:srgbClr val="F2F0EA"/>
+                </a:solidFill>
+                <a:latin typeface="Georgia" pitchFamily="34" charset="0"/>
+                <a:ea typeface="Georgia" pitchFamily="34" charset="-122"/>
+                <a:cs typeface="Georgia" pitchFamily="34" charset="-120"/>
+              </a:rPr>
+              <a:t>, </a:t>
+            </a:r>
+            <a:pPr indent="0" marL="0">
+              <a:lnSpc>
+                <a:spcPct val="120000"/>
+              </a:lnSpc>
+              <a:buNone/>
+            </a:pPr>
+            <a:r>
+              <a:rPr lang="en-US" sz="2300" i="1" dirty="0">
+                <a:solidFill>
+                  <a:srgbClr val="F2F0EA"/>
+                </a:solidFill>
+                <a:latin typeface="Georgia" pitchFamily="34" charset="0"/>
+                <a:ea typeface="Georgia" pitchFamily="34" charset="-122"/>
+                <a:cs typeface="Georgia" pitchFamily="34" charset="-120"/>
+              </a:rPr>
+              <a:t>contudo</a:t>
+            </a:r>
+            <a:pPr indent="0" marL="0">
+              <a:lnSpc>
+                <a:spcPct val="120000"/>
+              </a:lnSpc>
+              <a:buNone/>
+            </a:pPr>
+            <a:r>
+              <a:rPr lang="en-US" sz="2300" dirty="0">
+                <a:solidFill>
+                  <a:srgbClr val="F2F0EA"/>
+                </a:solidFill>
+                <a:latin typeface="Georgia" pitchFamily="34" charset="0"/>
+                <a:ea typeface="Georgia" pitchFamily="34" charset="-122"/>
+                <a:cs typeface="Georgia" pitchFamily="34" charset="-120"/>
+              </a:rPr>
+              <a:t>, </a:t>
+            </a:r>
+            <a:pPr indent="0" marL="0">
+              <a:lnSpc>
+                <a:spcPct val="120000"/>
+              </a:lnSpc>
+              <a:buNone/>
+            </a:pPr>
+            <a:r>
+              <a:rPr lang="en-US" sz="2300" i="1" dirty="0">
+                <a:solidFill>
+                  <a:srgbClr val="F2F0EA"/>
+                </a:solidFill>
+                <a:latin typeface="Georgia" pitchFamily="34" charset="0"/>
+                <a:ea typeface="Georgia" pitchFamily="34" charset="-122"/>
+                <a:cs typeface="Georgia" pitchFamily="34" charset="-120"/>
+              </a:rPr>
+              <a:t>todavia</a:t>
+            </a:r>
+            <a:pPr indent="0" marL="0">
+              <a:lnSpc>
+                <a:spcPct val="120000"/>
+              </a:lnSpc>
+              <a:buNone/>
+            </a:pPr>
+            <a:r>
+              <a:rPr lang="en-US" sz="2300" dirty="0">
+                <a:solidFill>
+                  <a:srgbClr val="F2F0EA"/>
+                </a:solidFill>
+                <a:latin typeface="Georgia" pitchFamily="34" charset="0"/>
+                <a:ea typeface="Georgia" pitchFamily="34" charset="-122"/>
+                <a:cs typeface="Georgia" pitchFamily="34" charset="-120"/>
+              </a:rPr>
+              <a:t>, </a:t>
+            </a:r>
+            <a:pPr indent="0" marL="0">
+              <a:lnSpc>
+                <a:spcPct val="120000"/>
+              </a:lnSpc>
+              <a:buNone/>
+            </a:pPr>
+            <a:r>
+              <a:rPr lang="en-US" sz="2300" i="1" dirty="0">
+                <a:solidFill>
+                  <a:srgbClr val="F2F0EA"/>
+                </a:solidFill>
+                <a:latin typeface="Georgia" pitchFamily="34" charset="0"/>
+                <a:ea typeface="Georgia" pitchFamily="34" charset="-122"/>
+                <a:cs typeface="Georgia" pitchFamily="34" charset="-120"/>
+              </a:rPr>
+              <a:t>por isso</a:t>
+            </a:r>
+            <a:pPr indent="0" marL="0">
+              <a:lnSpc>
+                <a:spcPct val="120000"/>
+              </a:lnSpc>
+              <a:buNone/>
+            </a:pPr>
+            <a:r>
+              <a:rPr lang="en-US" sz="2300" dirty="0">
+                <a:solidFill>
+                  <a:srgbClr val="F2F0EA"/>
+                </a:solidFill>
+                <a:latin typeface="Georgia" pitchFamily="34" charset="0"/>
+                <a:ea typeface="Georgia" pitchFamily="34" charset="-122"/>
+                <a:cs typeface="Georgia" pitchFamily="34" charset="-120"/>
+              </a:rPr>
+              <a:t> — que exprimem os mesmos valores sem serem conjunções.</a:t>
             </a:r>
             <a:endParaRPr lang="en-US" sz="2300" dirty="0"/>
           </a:p>
